--- a/assets/powerpoints/module-n3-epicerie/D2-lire-sa-facture.pptx
+++ b/assets/powerpoints/module-n3-epicerie/D2-lire-sa-facture.pptx
@@ -11116,7 +11116,25 @@
                 </a:solidFill>
                 <a:latin typeface="Verdana"/>
               </a:rPr>
-              <a:t>Pain, lait, légumes, viande, œufs : &lt;b&gt;aucune taxe&lt;/b&gt;. Les taxes s'ajoutent sur les produits d'entretien, les boissons gazeuses, les plats préparés et les portions individuelles. C'est pour cela que la ligne des taxes est souvent très petite sur une facture d'épicerie.</a:t>
+              <a:t>Pain, lait, légumes, viande, œufs : </a:t>
+            </a:r>
+            <a:r>
+              <a:rPr sz="2000" b="1" i="0">
+                <a:solidFill>
+                  <a:srgbClr val="4B4F52"/>
+                </a:solidFill>
+                <a:latin typeface="Verdana"/>
+              </a:rPr>
+              <a:t>aucune taxe</a:t>
+            </a:r>
+            <a:r>
+              <a:rPr sz="2000" b="0" i="0">
+                <a:solidFill>
+                  <a:srgbClr val="4B4F52"/>
+                </a:solidFill>
+                <a:latin typeface="Verdana"/>
+              </a:rPr>
+              <a:t>. Les taxes s'ajoutent sur les produits d'entretien, les boissons gazeuses, les plats préparés et les portions individuelles. C'est pour cela que la ligne des taxes est souvent très petite sur une facture d'épicerie.</a:t>
             </a:r>
           </a:p>
         </p:txBody>
